--- a/session2/exam-strategy/q2/q2_exam_strategy.pptx
+++ b/session2/exam-strategy/q2/q2_exam_strategy.pptx
@@ -3187,8 +3187,8 @@
         </p:nvSpPr>
         <p:spPr>
           <a:xfrm>
-            <a:off x="274320" y="685800"/>
-            <a:ext cx="6400800" cy="1645920"/>
+            <a:off x="274320" y="640080"/>
+            <a:ext cx="6583680" cy="1280160"/>
           </a:xfrm>
           <a:prstGeom prst="rect">
             <a:avLst/>
@@ -3196,13 +3196,13 @@
           <a:noFill/>
         </p:spPr>
         <p:txBody>
-          <a:bodyPr wrap="square">
+          <a:bodyPr wrap="square" tIns="0" bIns="0">
             <a:spAutoFit/>
           </a:bodyPr>
           <a:lstStyle/>
           <a:p>
             <a:pPr>
-              <a:defRPr sz="1100">
+              <a:defRPr sz="900">
                 <a:solidFill>
                   <a:srgbClr val="FFFFFF"/>
                 </a:solidFill>
@@ -3210,7 +3210,7 @@
               </a:defRPr>
             </a:pPr>
             <a:r>
-              <a:t>A developer is building a web application that uses Amazon API Gateway. The developer wants to maintain different environments for development (dev) and production (prod) workloads. The API will be backed by an AWS Lambda function with two aliases: one for dev and one for prod. How can the developer maintain these environments with the LEAST amount of configuration?</a:t>
+              <a:t>A developer is building a web application that uses Amazon API Gateway. The developer wants to maintain different environments for development (dev) and production (prod) workloads. The API will be backed by an AWS Lambda function with two aliases: one for dev and one for prod. How can the developer maintain these environments with the LEAST amo...</a:t>
             </a:r>
           </a:p>
         </p:txBody>
@@ -3223,8 +3223,8 @@
         </p:nvSpPr>
         <p:spPr>
           <a:xfrm>
-            <a:off x="365760" y="2377440"/>
-            <a:ext cx="274320" cy="274320"/>
+            <a:off x="274320" y="2057400"/>
+            <a:ext cx="201168" cy="201168"/>
           </a:xfrm>
           <a:prstGeom prst="ellipse">
             <a:avLst/>
@@ -3255,7 +3255,7 @@
           <a:lstStyle/>
           <a:p>
             <a:pPr algn="ctr">
-              <a:defRPr sz="900" b="1">
+              <a:defRPr sz="700" b="1">
                 <a:solidFill>
                   <a:srgbClr val="FFFFFF"/>
                 </a:solidFill>
@@ -3275,8 +3275,8 @@
         </p:nvSpPr>
         <p:spPr>
           <a:xfrm>
-            <a:off x="777240" y="2377440"/>
-            <a:ext cx="5943600" cy="411480"/>
+            <a:off x="548640" y="2011680"/>
+            <a:ext cx="6400800" cy="736092"/>
           </a:xfrm>
           <a:prstGeom prst="rect">
             <a:avLst/>
@@ -3284,13 +3284,13 @@
           <a:noFill/>
         </p:spPr>
         <p:txBody>
-          <a:bodyPr wrap="square">
+          <a:bodyPr wrap="square" tIns="25400" bIns="0" lIns="0">
             <a:spAutoFit/>
           </a:bodyPr>
           <a:lstStyle/>
           <a:p>
             <a:pPr>
-              <a:defRPr sz="1000">
+              <a:defRPr sz="800">
                 <a:solidFill>
                   <a:srgbClr val="CCCCCC"/>
                 </a:solidFill>
@@ -3298,7 +3298,7 @@
               </a:defRPr>
             </a:pPr>
             <a:r>
-              <a:t>Create a REST API for each environment. Integrate the APIs with the corresponding dev and prod aliases of the Lambda function. Deploy the APIs to their respective stages. Access the APIs by using the stage URLs.</a:t>
+              <a:t>Create a REST API for each environment. Integrate the APIs with the corresponding dev and prod aliases of the ...</a:t>
             </a:r>
           </a:p>
         </p:txBody>
@@ -3311,8 +3311,8 @@
         </p:nvSpPr>
         <p:spPr>
           <a:xfrm>
-            <a:off x="365760" y="2834640"/>
-            <a:ext cx="274320" cy="274320"/>
+            <a:off x="274320" y="2811780"/>
+            <a:ext cx="201168" cy="201168"/>
           </a:xfrm>
           <a:prstGeom prst="ellipse">
             <a:avLst/>
@@ -3343,7 +3343,7 @@
           <a:lstStyle/>
           <a:p>
             <a:pPr algn="ctr">
-              <a:defRPr sz="900" b="1">
+              <a:defRPr sz="700" b="1">
                 <a:solidFill>
                   <a:srgbClr val="FFFFFF"/>
                 </a:solidFill>
@@ -3363,8 +3363,8 @@
         </p:nvSpPr>
         <p:spPr>
           <a:xfrm>
-            <a:off x="777240" y="2834640"/>
-            <a:ext cx="5943600" cy="411480"/>
+            <a:off x="548640" y="2766060"/>
+            <a:ext cx="6400800" cy="736092"/>
           </a:xfrm>
           <a:prstGeom prst="rect">
             <a:avLst/>
@@ -3372,13 +3372,13 @@
           <a:noFill/>
         </p:spPr>
         <p:txBody>
-          <a:bodyPr wrap="square">
+          <a:bodyPr wrap="square" tIns="25400" bIns="0" lIns="0">
             <a:spAutoFit/>
           </a:bodyPr>
           <a:lstStyle/>
           <a:p>
             <a:pPr>
-              <a:defRPr sz="1000">
+              <a:defRPr sz="800">
                 <a:solidFill>
                   <a:srgbClr val="CCCCCC"/>
                 </a:solidFill>
@@ -3386,7 +3386,7 @@
               </a:defRPr>
             </a:pPr>
             <a:r>
-              <a:t>Create one REST API. Integrate the API with the Lambda function by using a stage variable in place of an alias. Deploy the API to two different stages: dev and prod. Create a stage variable in each stage with different aliases as the values. Access the API by using the different stage URLs.</a:t>
+              <a:t>Create one REST API. Integrate the API with the Lambda function by using a stage variable in place of an alias...</a:t>
             </a:r>
           </a:p>
         </p:txBody>
@@ -3399,8 +3399,8 @@
         </p:nvSpPr>
         <p:spPr>
           <a:xfrm>
-            <a:off x="365760" y="3291840"/>
-            <a:ext cx="274320" cy="274320"/>
+            <a:off x="274320" y="3566160"/>
+            <a:ext cx="201168" cy="201168"/>
           </a:xfrm>
           <a:prstGeom prst="ellipse">
             <a:avLst/>
@@ -3431,7 +3431,7 @@
           <a:lstStyle/>
           <a:p>
             <a:pPr algn="ctr">
-              <a:defRPr sz="900" b="1">
+              <a:defRPr sz="700" b="1">
                 <a:solidFill>
                   <a:srgbClr val="FFFFFF"/>
                 </a:solidFill>
@@ -3451,8 +3451,8 @@
         </p:nvSpPr>
         <p:spPr>
           <a:xfrm>
-            <a:off x="777240" y="3291840"/>
-            <a:ext cx="5943600" cy="411480"/>
+            <a:off x="548640" y="3520440"/>
+            <a:ext cx="6400800" cy="736092"/>
           </a:xfrm>
           <a:prstGeom prst="rect">
             <a:avLst/>
@@ -3460,13 +3460,13 @@
           <a:noFill/>
         </p:spPr>
         <p:txBody>
-          <a:bodyPr wrap="square">
+          <a:bodyPr wrap="square" tIns="25400" bIns="0" lIns="0">
             <a:spAutoFit/>
           </a:bodyPr>
           <a:lstStyle/>
           <a:p>
             <a:pPr>
-              <a:defRPr sz="1000">
+              <a:defRPr sz="800">
                 <a:solidFill>
                   <a:srgbClr val="CCCCCC"/>
                 </a:solidFill>
@@ -3474,7 +3474,7 @@
               </a:defRPr>
             </a:pPr>
             <a:r>
-              <a:t>Create one REST API. Integrate the API with the dev alias of the Lambda function. Deploy the API to the dev environment. Configure a canary release deployment for the prod environment where the canary will integrate with the Lambda prod alias.</a:t>
+              <a:t>Create one REST API. Integrate the API with the dev alias of the Lambda function...</a:t>
             </a:r>
           </a:p>
         </p:txBody>
@@ -3487,8 +3487,8 @@
         </p:nvSpPr>
         <p:spPr>
           <a:xfrm>
-            <a:off x="365760" y="3749039"/>
-            <a:ext cx="274320" cy="274320"/>
+            <a:off x="274320" y="4320540"/>
+            <a:ext cx="201168" cy="201168"/>
           </a:xfrm>
           <a:prstGeom prst="ellipse">
             <a:avLst/>
@@ -3519,7 +3519,7 @@
           <a:lstStyle/>
           <a:p>
             <a:pPr algn="ctr">
-              <a:defRPr sz="900" b="1">
+              <a:defRPr sz="700" b="1">
                 <a:solidFill>
                   <a:srgbClr val="FFFFFF"/>
                 </a:solidFill>
@@ -3539,8 +3539,8 @@
         </p:nvSpPr>
         <p:spPr>
           <a:xfrm>
-            <a:off x="777240" y="3749039"/>
-            <a:ext cx="5943600" cy="411480"/>
+            <a:off x="548640" y="4274820"/>
+            <a:ext cx="6400800" cy="736092"/>
           </a:xfrm>
           <a:prstGeom prst="rect">
             <a:avLst/>
@@ -3548,13 +3548,13 @@
           <a:noFill/>
         </p:spPr>
         <p:txBody>
-          <a:bodyPr wrap="square">
+          <a:bodyPr wrap="square" tIns="25400" bIns="0" lIns="0">
             <a:spAutoFit/>
           </a:bodyPr>
           <a:lstStyle/>
           <a:p>
             <a:pPr>
-              <a:defRPr sz="1000">
+              <a:defRPr sz="800">
                 <a:solidFill>
                   <a:srgbClr val="CCCCCC"/>
                 </a:solidFill>
@@ -3562,7 +3562,7 @@
               </a:defRPr>
             </a:pPr>
             <a:r>
-              <a:t>Create one REST API. Integrate the API with the prod alias of the Lambda function. Deploy the API to the prod environment. Configure a canary release deployment for the dev environment where the canary will integrate with the Lambda dev alias</a:t>
+              <a:t>Create one REST API. Integrate the API with the prod alias of the Lambda function...</a:t>
             </a:r>
           </a:p>
         </p:txBody>
@@ -3845,7 +3845,7 @@
         <p:spPr>
           <a:xfrm>
             <a:off x="182880" y="914400"/>
-            <a:ext cx="5280660" cy="3840480"/>
+            <a:ext cx="4079019" cy="3840480"/>
           </a:xfrm>
           <a:prstGeom prst="rect">
             <a:avLst/>
@@ -3980,9 +3980,9 @@
           <a:p>
             <a:pPr>
               <a:spcAft>
-                <a:spcPts val="600"/>
+                <a:spcPts val="400"/>
               </a:spcAft>
-              <a:defRPr sz="900">
+              <a:defRPr sz="800">
                 <a:solidFill>
                   <a:srgbClr val="212121"/>
                 </a:solidFill>
@@ -3990,15 +3990,15 @@
               </a:defRPr>
             </a:pPr>
             <a:r>
-              <a:t>• Very similar to A, but has a REST API for each environment.</a:t>
+              <a:t>• Very similar to A, but has a REST API for each environment</a:t>
             </a:r>
           </a:p>
           <a:p>
             <a:pPr>
               <a:spcAft>
-                <a:spcPts val="600"/>
+                <a:spcPts val="400"/>
               </a:spcAft>
-              <a:defRPr sz="900">
+              <a:defRPr sz="800">
                 <a:solidFill>
                   <a:srgbClr val="212121"/>
                 </a:solidFill>
@@ -4006,7 +4006,7 @@
               </a:defRPr>
             </a:pPr>
             <a:r>
-              <a:t>• B offers less configuration, so it’s a better answer.</a:t>
+              <a:t>• B offers less configuration, so it’s a better answer</a:t>
             </a:r>
           </a:p>
         </p:txBody>
@@ -4185,8 +4185,8 @@
         </p:blipFill>
         <p:spPr>
           <a:xfrm>
-            <a:off x="182880" y="914400"/>
-            <a:ext cx="5280660" cy="3840480"/>
+            <a:off x="182880" y="974363"/>
+            <a:ext cx="5303520" cy="3720552"/>
           </a:xfrm>
           <a:prstGeom prst="rect">
             <a:avLst/>
@@ -4321,9 +4321,9 @@
           <a:p>
             <a:pPr>
               <a:spcAft>
-                <a:spcPts val="600"/>
+                <a:spcPts val="400"/>
               </a:spcAft>
-              <a:defRPr sz="900">
+              <a:defRPr sz="800">
                 <a:solidFill>
                   <a:srgbClr val="212121"/>
                 </a:solidFill>
@@ -4331,15 +4331,15 @@
               </a:defRPr>
             </a:pPr>
             <a:r>
-              <a:t>• With deployment stages in Amazon API Gateway, you can manage multiple release stages for each API.</a:t>
+              <a:t>• With deployment stages in Amazon API Gateway</a:t>
             </a:r>
           </a:p>
           <a:p>
             <a:pPr>
               <a:spcAft>
-                <a:spcPts val="600"/>
+                <a:spcPts val="400"/>
               </a:spcAft>
-              <a:defRPr sz="900">
+              <a:defRPr sz="800">
                 <a:solidFill>
                   <a:srgbClr val="212121"/>
                 </a:solidFill>
@@ -4347,15 +4347,31 @@
               </a:defRPr>
             </a:pPr>
             <a:r>
-              <a:t>• You can configure stage variables so that an API deployment stage can interact with different backend endpoints.</a:t>
+              <a:t>• You can manage multiple release stages for each API</a:t>
             </a:r>
           </a:p>
           <a:p>
             <a:pPr>
               <a:spcAft>
-                <a:spcPts val="600"/>
+                <a:spcPts val="400"/>
               </a:spcAft>
-              <a:defRPr sz="900">
+              <a:defRPr sz="800">
+                <a:solidFill>
+                  <a:srgbClr val="212121"/>
+                </a:solidFill>
+                <a:latin typeface="Segoe UI"/>
+              </a:defRPr>
+            </a:pPr>
+            <a:r>
+              <a:t>• You can configure stage variables so that an API deployment stage can interact with different backend endpoints</a:t>
+            </a:r>
+          </a:p>
+          <a:p>
+            <a:pPr>
+              <a:spcAft>
+                <a:spcPts val="400"/>
+              </a:spcAft>
+              <a:defRPr sz="800">
                 <a:solidFill>
                   <a:srgbClr val="212121"/>
                 </a:solidFill>
@@ -4543,7 +4559,7 @@
         <p:spPr>
           <a:xfrm>
             <a:off x="182880" y="914400"/>
-            <a:ext cx="5280660" cy="3840480"/>
+            <a:ext cx="3846739" cy="3840480"/>
           </a:xfrm>
           <a:prstGeom prst="rect">
             <a:avLst/>
@@ -4678,9 +4694,9 @@
           <a:p>
             <a:pPr>
               <a:spcAft>
-                <a:spcPts val="600"/>
+                <a:spcPts val="400"/>
               </a:spcAft>
-              <a:defRPr sz="900">
+              <a:defRPr sz="800">
                 <a:solidFill>
                   <a:srgbClr val="212121"/>
                 </a:solidFill>
@@ -4868,7 +4884,7 @@
         <p:spPr>
           <a:xfrm>
             <a:off x="182880" y="914400"/>
-            <a:ext cx="5280660" cy="3840480"/>
+            <a:ext cx="3906209" cy="3840480"/>
           </a:xfrm>
           <a:prstGeom prst="rect">
             <a:avLst/>
@@ -5003,9 +5019,9 @@
           <a:p>
             <a:pPr>
               <a:spcAft>
-                <a:spcPts val="600"/>
+                <a:spcPts val="400"/>
               </a:spcAft>
-              <a:defRPr sz="900">
+              <a:defRPr sz="800">
                 <a:solidFill>
                   <a:srgbClr val="212121"/>
                 </a:solidFill>
@@ -5013,15 +5029,15 @@
               </a:defRPr>
             </a:pPr>
             <a:r>
-              <a:t>• C &amp; D are both incorrect because in a canary release deployment, total API traffic is separated at random into a production release and a canary release with a pre-configured ratio.</a:t>
+              <a:t>• C &amp; D are both incorrect because in a canary release deployment</a:t>
             </a:r>
           </a:p>
           <a:p>
             <a:pPr>
               <a:spcAft>
-                <a:spcPts val="600"/>
+                <a:spcPts val="400"/>
               </a:spcAft>
-              <a:defRPr sz="900">
+              <a:defRPr sz="800">
                 <a:solidFill>
                   <a:srgbClr val="212121"/>
                 </a:solidFill>
@@ -5029,15 +5045,15 @@
               </a:defRPr>
             </a:pPr>
             <a:r>
-              <a:t>• Typically, the canary release receives a small percentage of API traffic and the production release takes up the rest.</a:t>
+              <a:t>• Total API traffic is separated at random into a production release and a canary release with a pre-configured ratio</a:t>
             </a:r>
           </a:p>
           <a:p>
             <a:pPr>
               <a:spcAft>
-                <a:spcPts val="600"/>
+                <a:spcPts val="400"/>
               </a:spcAft>
-              <a:defRPr sz="900">
+              <a:defRPr sz="800">
                 <a:solidFill>
                   <a:srgbClr val="212121"/>
                 </a:solidFill>
@@ -5045,15 +5061,31 @@
               </a:defRPr>
             </a:pPr>
             <a:r>
-              <a:t>• The updated API features are only visible to API traffic through the canary.</a:t>
+              <a:t>• Typically, the canary release receives a small percentage of API traffic and the production release takes up the rest</a:t>
             </a:r>
           </a:p>
           <a:p>
             <a:pPr>
               <a:spcAft>
-                <a:spcPts val="600"/>
+                <a:spcPts val="400"/>
               </a:spcAft>
-              <a:defRPr sz="900">
+              <a:defRPr sz="800">
+                <a:solidFill>
+                  <a:srgbClr val="212121"/>
+                </a:solidFill>
+                <a:latin typeface="Segoe UI"/>
+              </a:defRPr>
+            </a:pPr>
+            <a:r>
+              <a:t>• The updated API features are only visible to API traffic through the canary</a:t>
+            </a:r>
+          </a:p>
+          <a:p>
+            <a:pPr>
+              <a:spcAft>
+                <a:spcPts val="400"/>
+              </a:spcAft>
+              <a:defRPr sz="800">
                 <a:solidFill>
                   <a:srgbClr val="212121"/>
                 </a:solidFill>

--- a/session2/exam-strategy/q2/q2_exam_strategy.pptx
+++ b/session2/exam-strategy/q2/q2_exam_strategy.pptx
@@ -3187,8 +3187,8 @@
         </p:nvSpPr>
         <p:spPr>
           <a:xfrm>
-            <a:off x="274320" y="640080"/>
-            <a:ext cx="6583680" cy="1280160"/>
+            <a:off x="274320" y="685800"/>
+            <a:ext cx="6400800" cy="1645920"/>
           </a:xfrm>
           <a:prstGeom prst="rect">
             <a:avLst/>
@@ -3196,13 +3196,13 @@
           <a:noFill/>
         </p:spPr>
         <p:txBody>
-          <a:bodyPr wrap="square" tIns="0" bIns="0">
+          <a:bodyPr wrap="square">
             <a:spAutoFit/>
           </a:bodyPr>
           <a:lstStyle/>
           <a:p>
             <a:pPr>
-              <a:defRPr sz="900">
+              <a:defRPr sz="1100">
                 <a:solidFill>
                   <a:srgbClr val="FFFFFF"/>
                 </a:solidFill>
@@ -3210,7 +3210,7 @@
               </a:defRPr>
             </a:pPr>
             <a:r>
-              <a:t>A developer is building a web application that uses Amazon API Gateway. The developer wants to maintain different environments for development (dev) and production (prod) workloads. The API will be backed by an AWS Lambda function with two aliases: one for dev and one for prod. How can the developer maintain these environments with the LEAST amo...</a:t>
+              <a:t>A developer is building a web application that uses Amazon API Gateway. The developer wants to maintain different environments for development (dev) and production (prod) workloads. The API will be backed by an AWS Lambda function with two aliases: one for dev and one for prod. How can the developer maintain these environments with the LEAST amount of configuration?</a:t>
             </a:r>
           </a:p>
         </p:txBody>
@@ -3223,8 +3223,8 @@
         </p:nvSpPr>
         <p:spPr>
           <a:xfrm>
-            <a:off x="274320" y="2057400"/>
-            <a:ext cx="201168" cy="201168"/>
+            <a:off x="365760" y="2377440"/>
+            <a:ext cx="274320" cy="274320"/>
           </a:xfrm>
           <a:prstGeom prst="ellipse">
             <a:avLst/>
@@ -3255,7 +3255,7 @@
           <a:lstStyle/>
           <a:p>
             <a:pPr algn="ctr">
-              <a:defRPr sz="700" b="1">
+              <a:defRPr sz="900" b="1">
                 <a:solidFill>
                   <a:srgbClr val="FFFFFF"/>
                 </a:solidFill>
@@ -3275,8 +3275,8 @@
         </p:nvSpPr>
         <p:spPr>
           <a:xfrm>
-            <a:off x="548640" y="2011680"/>
-            <a:ext cx="6400800" cy="736092"/>
+            <a:off x="777240" y="2377440"/>
+            <a:ext cx="5943600" cy="411480"/>
           </a:xfrm>
           <a:prstGeom prst="rect">
             <a:avLst/>
@@ -3284,13 +3284,13 @@
           <a:noFill/>
         </p:spPr>
         <p:txBody>
-          <a:bodyPr wrap="square" tIns="25400" bIns="0" lIns="0">
+          <a:bodyPr wrap="square">
             <a:spAutoFit/>
           </a:bodyPr>
           <a:lstStyle/>
           <a:p>
             <a:pPr>
-              <a:defRPr sz="800">
+              <a:defRPr sz="1000">
                 <a:solidFill>
                   <a:srgbClr val="CCCCCC"/>
                 </a:solidFill>
@@ -3298,7 +3298,7 @@
               </a:defRPr>
             </a:pPr>
             <a:r>
-              <a:t>Create a REST API for each environment. Integrate the APIs with the corresponding dev and prod aliases of the ...</a:t>
+              <a:t>Create a REST API for each environment. Integrate the APIs with the corresponding dev and prod aliases of the Lambda function. Deploy the APIs to their respective stages. Access the APIs by using the stage URLs.</a:t>
             </a:r>
           </a:p>
         </p:txBody>
@@ -3311,8 +3311,8 @@
         </p:nvSpPr>
         <p:spPr>
           <a:xfrm>
-            <a:off x="274320" y="2811780"/>
-            <a:ext cx="201168" cy="201168"/>
+            <a:off x="365760" y="2834640"/>
+            <a:ext cx="274320" cy="274320"/>
           </a:xfrm>
           <a:prstGeom prst="ellipse">
             <a:avLst/>
@@ -3343,7 +3343,7 @@
           <a:lstStyle/>
           <a:p>
             <a:pPr algn="ctr">
-              <a:defRPr sz="700" b="1">
+              <a:defRPr sz="900" b="1">
                 <a:solidFill>
                   <a:srgbClr val="FFFFFF"/>
                 </a:solidFill>
@@ -3363,8 +3363,8 @@
         </p:nvSpPr>
         <p:spPr>
           <a:xfrm>
-            <a:off x="548640" y="2766060"/>
-            <a:ext cx="6400800" cy="736092"/>
+            <a:off x="777240" y="2834640"/>
+            <a:ext cx="5943600" cy="411480"/>
           </a:xfrm>
           <a:prstGeom prst="rect">
             <a:avLst/>
@@ -3372,13 +3372,13 @@
           <a:noFill/>
         </p:spPr>
         <p:txBody>
-          <a:bodyPr wrap="square" tIns="25400" bIns="0" lIns="0">
+          <a:bodyPr wrap="square">
             <a:spAutoFit/>
           </a:bodyPr>
           <a:lstStyle/>
           <a:p>
             <a:pPr>
-              <a:defRPr sz="800">
+              <a:defRPr sz="1000">
                 <a:solidFill>
                   <a:srgbClr val="CCCCCC"/>
                 </a:solidFill>
@@ -3386,7 +3386,7 @@
               </a:defRPr>
             </a:pPr>
             <a:r>
-              <a:t>Create one REST API. Integrate the API with the Lambda function by using a stage variable in place of an alias...</a:t>
+              <a:t>Create one REST API. Integrate the API with the Lambda function by using a stage variable in place of an alias. Deploy the API to two different stages: dev and prod. Create a stage variable in each stage with different aliases as the values. Access the API by using the different stage URLs.</a:t>
             </a:r>
           </a:p>
         </p:txBody>
@@ -3399,8 +3399,8 @@
         </p:nvSpPr>
         <p:spPr>
           <a:xfrm>
-            <a:off x="274320" y="3566160"/>
-            <a:ext cx="201168" cy="201168"/>
+            <a:off x="365760" y="3291840"/>
+            <a:ext cx="274320" cy="274320"/>
           </a:xfrm>
           <a:prstGeom prst="ellipse">
             <a:avLst/>
@@ -3431,7 +3431,7 @@
           <a:lstStyle/>
           <a:p>
             <a:pPr algn="ctr">
-              <a:defRPr sz="700" b="1">
+              <a:defRPr sz="900" b="1">
                 <a:solidFill>
                   <a:srgbClr val="FFFFFF"/>
                 </a:solidFill>
@@ -3451,8 +3451,8 @@
         </p:nvSpPr>
         <p:spPr>
           <a:xfrm>
-            <a:off x="548640" y="3520440"/>
-            <a:ext cx="6400800" cy="736092"/>
+            <a:off x="777240" y="3291840"/>
+            <a:ext cx="5943600" cy="411480"/>
           </a:xfrm>
           <a:prstGeom prst="rect">
             <a:avLst/>
@@ -3460,13 +3460,13 @@
           <a:noFill/>
         </p:spPr>
         <p:txBody>
-          <a:bodyPr wrap="square" tIns="25400" bIns="0" lIns="0">
+          <a:bodyPr wrap="square">
             <a:spAutoFit/>
           </a:bodyPr>
           <a:lstStyle/>
           <a:p>
             <a:pPr>
-              <a:defRPr sz="800">
+              <a:defRPr sz="1000">
                 <a:solidFill>
                   <a:srgbClr val="CCCCCC"/>
                 </a:solidFill>
@@ -3474,7 +3474,7 @@
               </a:defRPr>
             </a:pPr>
             <a:r>
-              <a:t>Create one REST API. Integrate the API with the dev alias of the Lambda function...</a:t>
+              <a:t>Create one REST API. Integrate the API with the dev alias of the Lambda function. Deploy the API to the dev environment. Configure a canary release deployment for the prod environment where the canary will integrate with the Lambda prod alias.</a:t>
             </a:r>
           </a:p>
         </p:txBody>
@@ -3487,8 +3487,8 @@
         </p:nvSpPr>
         <p:spPr>
           <a:xfrm>
-            <a:off x="274320" y="4320540"/>
-            <a:ext cx="201168" cy="201168"/>
+            <a:off x="365760" y="3749039"/>
+            <a:ext cx="274320" cy="274320"/>
           </a:xfrm>
           <a:prstGeom prst="ellipse">
             <a:avLst/>
@@ -3519,7 +3519,7 @@
           <a:lstStyle/>
           <a:p>
             <a:pPr algn="ctr">
-              <a:defRPr sz="700" b="1">
+              <a:defRPr sz="900" b="1">
                 <a:solidFill>
                   <a:srgbClr val="FFFFFF"/>
                 </a:solidFill>
@@ -3539,8 +3539,8 @@
         </p:nvSpPr>
         <p:spPr>
           <a:xfrm>
-            <a:off x="548640" y="4274820"/>
-            <a:ext cx="6400800" cy="736092"/>
+            <a:off x="777240" y="3749039"/>
+            <a:ext cx="5943600" cy="411480"/>
           </a:xfrm>
           <a:prstGeom prst="rect">
             <a:avLst/>
@@ -3548,13 +3548,13 @@
           <a:noFill/>
         </p:spPr>
         <p:txBody>
-          <a:bodyPr wrap="square" tIns="25400" bIns="0" lIns="0">
+          <a:bodyPr wrap="square">
             <a:spAutoFit/>
           </a:bodyPr>
           <a:lstStyle/>
           <a:p>
             <a:pPr>
-              <a:defRPr sz="800">
+              <a:defRPr sz="1000">
                 <a:solidFill>
                   <a:srgbClr val="CCCCCC"/>
                 </a:solidFill>
@@ -3562,7 +3562,7 @@
               </a:defRPr>
             </a:pPr>
             <a:r>
-              <a:t>Create one REST API. Integrate the API with the prod alias of the Lambda function...</a:t>
+              <a:t>Create one REST API. Integrate the API with the prod alias of the Lambda function. Deploy the API to the prod environment. Configure a canary release deployment for the dev environment where the canary will integrate with the Lambda dev alias</a:t>
             </a:r>
           </a:p>
         </p:txBody>
@@ -3845,7 +3845,7 @@
         <p:spPr>
           <a:xfrm>
             <a:off x="182880" y="914400"/>
-            <a:ext cx="4079019" cy="3840480"/>
+            <a:ext cx="5111430" cy="3840480"/>
           </a:xfrm>
           <a:prstGeom prst="rect">
             <a:avLst/>
@@ -3980,9 +3980,9 @@
           <a:p>
             <a:pPr>
               <a:spcAft>
-                <a:spcPts val="400"/>
+                <a:spcPts val="600"/>
               </a:spcAft>
-              <a:defRPr sz="800">
+              <a:defRPr sz="900">
                 <a:solidFill>
                   <a:srgbClr val="212121"/>
                 </a:solidFill>
@@ -3990,15 +3990,15 @@
               </a:defRPr>
             </a:pPr>
             <a:r>
-              <a:t>• Very similar to A, but has a REST API for each environment</a:t>
+              <a:t>• Very similar to A, but has a REST API for each environment.</a:t>
             </a:r>
           </a:p>
           <a:p>
             <a:pPr>
               <a:spcAft>
-                <a:spcPts val="400"/>
+                <a:spcPts val="600"/>
               </a:spcAft>
-              <a:defRPr sz="800">
+              <a:defRPr sz="900">
                 <a:solidFill>
                   <a:srgbClr val="212121"/>
                 </a:solidFill>
@@ -4006,7 +4006,7 @@
               </a:defRPr>
             </a:pPr>
             <a:r>
-              <a:t>• B offers less configuration, so it’s a better answer</a:t>
+              <a:t>• B offers less configuration, so it’s a better answer.</a:t>
             </a:r>
           </a:p>
         </p:txBody>
@@ -4185,8 +4185,8 @@
         </p:blipFill>
         <p:spPr>
           <a:xfrm>
-            <a:off x="182880" y="974363"/>
-            <a:ext cx="5303520" cy="3720552"/>
+            <a:off x="182880" y="914400"/>
+            <a:ext cx="5204632" cy="3840480"/>
           </a:xfrm>
           <a:prstGeom prst="rect">
             <a:avLst/>
@@ -4321,9 +4321,9 @@
           <a:p>
             <a:pPr>
               <a:spcAft>
-                <a:spcPts val="400"/>
+                <a:spcPts val="600"/>
               </a:spcAft>
-              <a:defRPr sz="800">
+              <a:defRPr sz="900">
                 <a:solidFill>
                   <a:srgbClr val="212121"/>
                 </a:solidFill>
@@ -4331,15 +4331,15 @@
               </a:defRPr>
             </a:pPr>
             <a:r>
-              <a:t>• With deployment stages in Amazon API Gateway</a:t>
+              <a:t>• With deployment stages in Amazon API Gateway, you can manage multiple release stages for each API.</a:t>
             </a:r>
           </a:p>
           <a:p>
             <a:pPr>
               <a:spcAft>
-                <a:spcPts val="400"/>
+                <a:spcPts val="600"/>
               </a:spcAft>
-              <a:defRPr sz="800">
+              <a:defRPr sz="900">
                 <a:solidFill>
                   <a:srgbClr val="212121"/>
                 </a:solidFill>
@@ -4347,31 +4347,15 @@
               </a:defRPr>
             </a:pPr>
             <a:r>
-              <a:t>• You can manage multiple release stages for each API</a:t>
+              <a:t>• You can configure stage variables so that an API deployment stage can interact with different backend endpoints.</a:t>
             </a:r>
           </a:p>
           <a:p>
             <a:pPr>
               <a:spcAft>
-                <a:spcPts val="400"/>
+                <a:spcPts val="600"/>
               </a:spcAft>
-              <a:defRPr sz="800">
-                <a:solidFill>
-                  <a:srgbClr val="212121"/>
-                </a:solidFill>
-                <a:latin typeface="Segoe UI"/>
-              </a:defRPr>
-            </a:pPr>
-            <a:r>
-              <a:t>• You can configure stage variables so that an API deployment stage can interact with different backend endpoints</a:t>
-            </a:r>
-          </a:p>
-          <a:p>
-            <a:pPr>
-              <a:spcAft>
-                <a:spcPts val="400"/>
-              </a:spcAft>
-              <a:defRPr sz="800">
+              <a:defRPr sz="900">
                 <a:solidFill>
                   <a:srgbClr val="212121"/>
                 </a:solidFill>
@@ -4559,7 +4543,7 @@
         <p:spPr>
           <a:xfrm>
             <a:off x="182880" y="914400"/>
-            <a:ext cx="3846739" cy="3840480"/>
+            <a:ext cx="4825098" cy="3840480"/>
           </a:xfrm>
           <a:prstGeom prst="rect">
             <a:avLst/>
@@ -4694,9 +4678,9 @@
           <a:p>
             <a:pPr>
               <a:spcAft>
-                <a:spcPts val="400"/>
+                <a:spcPts val="600"/>
               </a:spcAft>
-              <a:defRPr sz="800">
+              <a:defRPr sz="900">
                 <a:solidFill>
                   <a:srgbClr val="212121"/>
                 </a:solidFill>
@@ -4884,7 +4868,7 @@
         <p:spPr>
           <a:xfrm>
             <a:off x="182880" y="914400"/>
-            <a:ext cx="3906209" cy="3840480"/>
+            <a:ext cx="5044421" cy="3840480"/>
           </a:xfrm>
           <a:prstGeom prst="rect">
             <a:avLst/>
@@ -5019,9 +5003,9 @@
           <a:p>
             <a:pPr>
               <a:spcAft>
-                <a:spcPts val="400"/>
+                <a:spcPts val="600"/>
               </a:spcAft>
-              <a:defRPr sz="800">
+              <a:defRPr sz="900">
                 <a:solidFill>
                   <a:srgbClr val="212121"/>
                 </a:solidFill>
@@ -5029,15 +5013,15 @@
               </a:defRPr>
             </a:pPr>
             <a:r>
-              <a:t>• C &amp; D are both incorrect because in a canary release deployment</a:t>
+              <a:t>• C &amp; D are both incorrect because in a canary release deployment, total API traffic is separated at random into a production release and a canary release with a pre-configured ratio.</a:t>
             </a:r>
           </a:p>
           <a:p>
             <a:pPr>
               <a:spcAft>
-                <a:spcPts val="400"/>
+                <a:spcPts val="600"/>
               </a:spcAft>
-              <a:defRPr sz="800">
+              <a:defRPr sz="900">
                 <a:solidFill>
                   <a:srgbClr val="212121"/>
                 </a:solidFill>
@@ -5045,15 +5029,15 @@
               </a:defRPr>
             </a:pPr>
             <a:r>
-              <a:t>• Total API traffic is separated at random into a production release and a canary release with a pre-configured ratio</a:t>
+              <a:t>• Typically, the canary release receives a small percentage of API traffic and the production release takes up the rest.</a:t>
             </a:r>
           </a:p>
           <a:p>
             <a:pPr>
               <a:spcAft>
-                <a:spcPts val="400"/>
+                <a:spcPts val="600"/>
               </a:spcAft>
-              <a:defRPr sz="800">
+              <a:defRPr sz="900">
                 <a:solidFill>
                   <a:srgbClr val="212121"/>
                 </a:solidFill>
@@ -5061,31 +5045,15 @@
               </a:defRPr>
             </a:pPr>
             <a:r>
-              <a:t>• Typically, the canary release receives a small percentage of API traffic and the production release takes up the rest</a:t>
+              <a:t>• The updated API features are only visible to API traffic through the canary.</a:t>
             </a:r>
           </a:p>
           <a:p>
             <a:pPr>
               <a:spcAft>
-                <a:spcPts val="400"/>
+                <a:spcPts val="600"/>
               </a:spcAft>
-              <a:defRPr sz="800">
-                <a:solidFill>
-                  <a:srgbClr val="212121"/>
-                </a:solidFill>
-                <a:latin typeface="Segoe UI"/>
-              </a:defRPr>
-            </a:pPr>
-            <a:r>
-              <a:t>• The updated API features are only visible to API traffic through the canary</a:t>
-            </a:r>
-          </a:p>
-          <a:p>
-            <a:pPr>
-              <a:spcAft>
-                <a:spcPts val="400"/>
-              </a:spcAft>
-              <a:defRPr sz="800">
+              <a:defRPr sz="900">
                 <a:solidFill>
                   <a:srgbClr val="212121"/>
                 </a:solidFill>
